--- a/Misc/iOS_General.pptx
+++ b/Misc/iOS_General.pptx
@@ -5,8 +5,11 @@
     <p:sldMasterId id="2147483648" r:id="rId1"/>
   </p:sldMasterIdLst>
   <p:notesMasterIdLst>
-    <p:notesMasterId r:id="rId26"/>
+    <p:notesMasterId r:id="rId27"/>
   </p:notesMasterIdLst>
+  <p:handoutMasterIdLst>
+    <p:handoutMasterId r:id="rId28"/>
+  </p:handoutMasterIdLst>
   <p:sldIdLst>
     <p:sldId id="256" r:id="rId3"/>
     <p:sldId id="263" r:id="rId4"/>
@@ -21,21 +24,22 @@
     <p:sldId id="307" r:id="rId13"/>
     <p:sldId id="318" r:id="rId14"/>
     <p:sldId id="329" r:id="rId15"/>
-    <p:sldId id="268" r:id="rId16"/>
-    <p:sldId id="270" r:id="rId17"/>
-    <p:sldId id="271" r:id="rId18"/>
-    <p:sldId id="297" r:id="rId19"/>
-    <p:sldId id="296" r:id="rId20"/>
-    <p:sldId id="261" r:id="rId21"/>
-    <p:sldId id="257" r:id="rId22"/>
-    <p:sldId id="258" r:id="rId23"/>
-    <p:sldId id="259" r:id="rId24"/>
-    <p:sldId id="260" r:id="rId25"/>
+    <p:sldId id="340" r:id="rId16"/>
+    <p:sldId id="268" r:id="rId17"/>
+    <p:sldId id="270" r:id="rId18"/>
+    <p:sldId id="271" r:id="rId19"/>
+    <p:sldId id="297" r:id="rId20"/>
+    <p:sldId id="296" r:id="rId21"/>
+    <p:sldId id="261" r:id="rId22"/>
+    <p:sldId id="257" r:id="rId23"/>
+    <p:sldId id="258" r:id="rId24"/>
+    <p:sldId id="259" r:id="rId25"/>
+    <p:sldId id="260" r:id="rId26"/>
   </p:sldIdLst>
   <p:sldSz cx="12192000" cy="6858000"/>
   <p:notesSz cx="6858000" cy="9144000"/>
   <p:custDataLst>
-    <p:tags r:id="rId30"/>
+    <p:tags r:id="rId32"/>
   </p:custDataLst>
   <p:defaultTextStyle>
     <a:defPPr marL="0" marR="0" indent="0" algn="l" defTabSz="914400" rtl="0" fontAlgn="auto" latinLnBrk="1" hangingPunct="0">
@@ -362,6 +366,164 @@
     </a:lvl9pPr>
   </p:defaultTextStyle>
 </p:presentation>
+</file>
+
+<file path=ppt/handoutMasters/handoutMaster1.xml><?xml version="1.0" encoding="utf-8"?>
+<p:handoutMaster xmlns:a="http://schemas.openxmlformats.org/drawingml/2006/main" xmlns:r="http://schemas.openxmlformats.org/officeDocument/2006/relationships" xmlns:p="http://schemas.openxmlformats.org/presentationml/2006/main">
+  <p:cSld>
+    <p:bg>
+      <p:bgRef idx="1001">
+        <a:schemeClr val="bg1"/>
+      </p:bgRef>
+    </p:bg>
+    <p:spTree>
+      <p:nvGrpSpPr>
+        <p:cNvPr id="1" name=""/>
+        <p:cNvGrpSpPr/>
+        <p:nvPr/>
+      </p:nvGrpSpPr>
+      <p:grpSpPr>
+        <a:xfrm>
+          <a:off x="0" y="0"/>
+          <a:ext cx="0" cy="0"/>
+          <a:chOff x="0" y="0"/>
+          <a:chExt cx="0" cy="0"/>
+        </a:xfrm>
+      </p:grpSpPr>
+      <p:sp>
+        <p:nvSpPr>
+          <p:cNvPr id="2" name="页眉占位符 1"/>
+          <p:cNvSpPr>
+            <a:spLocks noGrp="1"/>
+          </p:cNvSpPr>
+          <p:nvPr>
+            <p:ph type="hdr" sz="quarter"/>
+          </p:nvPr>
+        </p:nvSpPr>
+        <p:spPr>
+          <a:xfrm>
+            <a:off x="0" y="0"/>
+            <a:ext cx="2971800" cy="458788"/>
+          </a:xfrm>
+          <a:prstGeom prst="rect">
+            <a:avLst/>
+          </a:prstGeom>
+        </p:spPr>
+        <p:txBody>
+          <a:bodyPr vert="horz" lIns="91440" tIns="45720" rIns="91440" bIns="45720" rtlCol="0"/>
+          <a:lstStyle>
+            <a:lvl1pPr algn="l">
+              <a:defRPr sz="1200"/>
+            </a:lvl1pPr>
+          </a:lstStyle>
+          <a:p>
+            <a:endParaRPr lang="zh-CN" altLang="en-US"/>
+          </a:p>
+        </p:txBody>
+      </p:sp>
+      <p:sp>
+        <p:nvSpPr>
+          <p:cNvPr id="3" name="日期占位符 2"/>
+          <p:cNvSpPr>
+            <a:spLocks noGrp="1"/>
+          </p:cNvSpPr>
+          <p:nvPr>
+            <p:ph type="dt" sz="quarter" idx="1"/>
+          </p:nvPr>
+        </p:nvSpPr>
+        <p:spPr>
+          <a:xfrm>
+            <a:off x="3884613" y="0"/>
+            <a:ext cx="2971800" cy="458788"/>
+          </a:xfrm>
+          <a:prstGeom prst="rect">
+            <a:avLst/>
+          </a:prstGeom>
+        </p:spPr>
+        <p:txBody>
+          <a:bodyPr vert="horz" lIns="91440" tIns="45720" rIns="91440" bIns="45720" rtlCol="0"/>
+          <a:lstStyle>
+            <a:lvl1pPr algn="r">
+              <a:defRPr sz="1200"/>
+            </a:lvl1pPr>
+          </a:lstStyle>
+          <a:p>
+            <a:fld id="{0F9B84EA-7D68-4D60-9CB1-D50884785D1C}" type="datetimeFigureOut">
+              <a:rPr lang="zh-CN" altLang="en-US" smtClean="0"/>
+            </a:fld>
+            <a:endParaRPr lang="zh-CN" altLang="en-US"/>
+          </a:p>
+        </p:txBody>
+      </p:sp>
+      <p:sp>
+        <p:nvSpPr>
+          <p:cNvPr id="4" name="页脚占位符 3"/>
+          <p:cNvSpPr>
+            <a:spLocks noGrp="1"/>
+          </p:cNvSpPr>
+          <p:nvPr>
+            <p:ph type="ftr" sz="quarter" idx="2"/>
+          </p:nvPr>
+        </p:nvSpPr>
+        <p:spPr>
+          <a:xfrm>
+            <a:off x="0" y="8685213"/>
+            <a:ext cx="2971800" cy="458787"/>
+          </a:xfrm>
+          <a:prstGeom prst="rect">
+            <a:avLst/>
+          </a:prstGeom>
+        </p:spPr>
+        <p:txBody>
+          <a:bodyPr vert="horz" lIns="91440" tIns="45720" rIns="91440" bIns="45720" rtlCol="0" anchor="b"/>
+          <a:lstStyle>
+            <a:lvl1pPr algn="l">
+              <a:defRPr sz="1200"/>
+            </a:lvl1pPr>
+          </a:lstStyle>
+          <a:p>
+            <a:endParaRPr lang="zh-CN" altLang="en-US"/>
+          </a:p>
+        </p:txBody>
+      </p:sp>
+      <p:sp>
+        <p:nvSpPr>
+          <p:cNvPr id="5" name="灯片编号占位符 4"/>
+          <p:cNvSpPr>
+            <a:spLocks noGrp="1"/>
+          </p:cNvSpPr>
+          <p:nvPr>
+            <p:ph type="sldNum" sz="quarter" idx="3"/>
+          </p:nvPr>
+        </p:nvSpPr>
+        <p:spPr>
+          <a:xfrm>
+            <a:off x="3884613" y="8685213"/>
+            <a:ext cx="2971800" cy="458787"/>
+          </a:xfrm>
+          <a:prstGeom prst="rect">
+            <a:avLst/>
+          </a:prstGeom>
+        </p:spPr>
+        <p:txBody>
+          <a:bodyPr vert="horz" lIns="91440" tIns="45720" rIns="91440" bIns="45720" rtlCol="0" anchor="b"/>
+          <a:lstStyle>
+            <a:lvl1pPr algn="r">
+              <a:defRPr sz="1200"/>
+            </a:lvl1pPr>
+          </a:lstStyle>
+          <a:p>
+            <a:fld id="{8D4E0FC9-F1F8-4FAE-9988-3BA365CFD46F}" type="slidenum">
+              <a:rPr lang="zh-CN" altLang="en-US" smtClean="0"/>
+            </a:fld>
+            <a:endParaRPr lang="zh-CN" altLang="en-US"/>
+          </a:p>
+        </p:txBody>
+      </p:sp>
+    </p:spTree>
+  </p:cSld>
+  <p:clrMap bg1="lt1" tx1="dk1" bg2="lt2" tx2="dk2" accent1="accent1" accent2="accent2" accent3="accent3" accent4="accent4" accent5="accent5" accent6="accent6" hlink="hlink" folHlink="folHlink"/>
+</p:handoutMaster>
 </file>
 
 <file path=ppt/notesMasters/notesMaster1.xml><?xml version="1.0" encoding="utf-8"?>
@@ -4482,7 +4644,7 @@
           <a:p>
             <a:r>
               <a:rPr lang="en-US" altLang="zh-CN"/>
-              <a:t>FAQ</a:t>
+              <a:t>Install from non-AppStore</a:t>
             </a:r>
             <a:endParaRPr lang="en-US" altLang="zh-CN"/>
           </a:p>
@@ -4504,7 +4666,7 @@
           <a:p>
             <a:r>
               <a:rPr lang="en-US" altLang="zh-CN"/>
-              <a:t>Legacy build system error using Unity project</a:t>
+              <a:t>References</a:t>
             </a:r>
             <a:endParaRPr lang="en-US" altLang="zh-CN"/>
           </a:p>
@@ -4512,61 +4674,45 @@
             <a:pPr lvl="1"/>
             <a:r>
               <a:rPr lang="en-US" altLang="zh-CN"/>
-              <a:t>File -&gt; Project Setting</a:t>
+              <a:t>https://zhuanlan.zhihu.com/p/136358328</a:t>
             </a:r>
             <a:endParaRPr lang="en-US" altLang="zh-CN"/>
           </a:p>
           <a:p>
-            <a:pPr lvl="2"/>
+            <a:pPr lvl="0"/>
             <a:r>
               <a:rPr lang="en-US" altLang="zh-CN"/>
-              <a:t>Change “Build System” from “Legacy Build System (Deprecated)” to “New Build System (Default)”</a:t>
+              <a:t>Methods</a:t>
             </a:r>
             <a:endParaRPr lang="en-US" altLang="zh-CN"/>
           </a:p>
           <a:p>
-            <a:pPr lvl="0"/>
+            <a:pPr lvl="1"/>
+            <a:r>
+              <a:rPr lang="zh-CN" altLang="en-US"/>
+              <a:t>企业签名</a:t>
+            </a:r>
+            <a:endParaRPr lang="zh-CN" altLang="en-US"/>
+          </a:p>
+          <a:p>
+            <a:pPr lvl="1"/>
+            <a:r>
+              <a:rPr lang="zh-CN" altLang="en-US"/>
+              <a:t>超级签名</a:t>
+            </a:r>
+            <a:endParaRPr lang="zh-CN" altLang="en-US"/>
+          </a:p>
+          <a:p>
+            <a:pPr lvl="1"/>
             <a:r>
               <a:rPr lang="en-US" altLang="zh-CN"/>
-              <a:t>mapfileparser.sh permission denied</a:t>
-            </a:r>
-            <a:endParaRPr lang="en-US" altLang="zh-CN"/>
-          </a:p>
-          <a:p>
-            <a:pPr lvl="1"/>
-            <a:r>
-              <a:rPr lang="en-US" altLang="zh-CN" sz="2000"/>
-              <a:t>Open terminal</a:t>
-            </a:r>
-            <a:endParaRPr lang="en-US" altLang="zh-CN" sz="2000"/>
-          </a:p>
-          <a:p>
-            <a:pPr lvl="1"/>
-            <a:r>
-              <a:rPr lang="en-US" altLang="zh-CN" sz="2000"/>
-              <a:t>chmod +x {}/MapFileParser.sh</a:t>
-            </a:r>
-            <a:endParaRPr lang="en-US" altLang="zh-CN" sz="2000"/>
-          </a:p>
-          <a:p>
-            <a:pPr lvl="0"/>
-            <a:r>
-              <a:rPr lang="en-US" altLang="zh-CN"/>
-              <a:t>UnityFramework.framework: errSecInternalComponent</a:t>
-            </a:r>
-            <a:endParaRPr lang="en-US" altLang="zh-CN"/>
-          </a:p>
-          <a:p>
-            <a:pPr lvl="1"/>
-            <a:r>
-              <a:rPr lang="en-US" altLang="zh-CN" sz="2000"/>
-              <a:t>When input password for login keychain, select “Always allow”</a:t>
-            </a:r>
-            <a:endParaRPr lang="en-US" altLang="zh-CN"/>
-          </a:p>
-          <a:p>
-            <a:pPr lvl="1"/>
-            <a:endParaRPr lang="en-US" altLang="zh-CN"/>
+              <a:t>TestFlight</a:t>
+            </a:r>
+            <a:r>
+              <a:rPr lang="zh-CN" altLang="en-US"/>
+              <a:t>签名</a:t>
+            </a:r>
+            <a:endParaRPr lang="zh-CN" altLang="en-US"/>
           </a:p>
         </p:txBody>
       </p:sp>
@@ -4593,7 +4739,7 @@
       <p:grpSpPr/>
       <p:sp>
         <p:nvSpPr>
-          <p:cNvPr id="4" name="标题 3"/>
+          <p:cNvPr id="2" name="标题 1"/>
           <p:cNvSpPr>
             <a:spLocks noGrp="1"/>
           </p:cNvSpPr>
@@ -4607,7 +4753,7 @@
           <a:p>
             <a:r>
               <a:rPr lang="en-US" altLang="zh-CN"/>
-              <a:t>Mac Usage</a:t>
+              <a:t>FAQ</a:t>
             </a:r>
             <a:endParaRPr lang="en-US" altLang="zh-CN"/>
           </a:p>
@@ -4615,19 +4761,83 @@
       </p:sp>
       <p:sp>
         <p:nvSpPr>
-          <p:cNvPr id="5" name="文本占位符 4"/>
+          <p:cNvPr id="3" name="内容占位符 2"/>
           <p:cNvSpPr>
             <a:spLocks noGrp="1"/>
           </p:cNvSpPr>
           <p:nvPr>
-            <p:ph type="body" idx="1"/>
+            <p:ph idx="1"/>
           </p:nvPr>
         </p:nvSpPr>
         <p:spPr/>
         <p:txBody>
           <a:bodyPr/>
           <a:p>
-            <a:endParaRPr lang="zh-CN" altLang="en-US"/>
+            <a:r>
+              <a:rPr lang="en-US" altLang="zh-CN"/>
+              <a:t>Legacy build system error using Unity project</a:t>
+            </a:r>
+            <a:endParaRPr lang="en-US" altLang="zh-CN"/>
+          </a:p>
+          <a:p>
+            <a:pPr lvl="1"/>
+            <a:r>
+              <a:rPr lang="en-US" altLang="zh-CN"/>
+              <a:t>File -&gt; Project Setting</a:t>
+            </a:r>
+            <a:endParaRPr lang="en-US" altLang="zh-CN"/>
+          </a:p>
+          <a:p>
+            <a:pPr lvl="2"/>
+            <a:r>
+              <a:rPr lang="en-US" altLang="zh-CN"/>
+              <a:t>Change “Build System” from “Legacy Build System (Deprecated)” to “New Build System (Default)”</a:t>
+            </a:r>
+            <a:endParaRPr lang="en-US" altLang="zh-CN"/>
+          </a:p>
+          <a:p>
+            <a:pPr lvl="0"/>
+            <a:r>
+              <a:rPr lang="en-US" altLang="zh-CN"/>
+              <a:t>mapfileparser.sh permission denied</a:t>
+            </a:r>
+            <a:endParaRPr lang="en-US" altLang="zh-CN"/>
+          </a:p>
+          <a:p>
+            <a:pPr lvl="1"/>
+            <a:r>
+              <a:rPr lang="en-US" altLang="zh-CN" sz="2000"/>
+              <a:t>Open terminal</a:t>
+            </a:r>
+            <a:endParaRPr lang="en-US" altLang="zh-CN" sz="2000"/>
+          </a:p>
+          <a:p>
+            <a:pPr lvl="1"/>
+            <a:r>
+              <a:rPr lang="en-US" altLang="zh-CN" sz="2000"/>
+              <a:t>chmod +x {}/MapFileParser.sh</a:t>
+            </a:r>
+            <a:endParaRPr lang="en-US" altLang="zh-CN" sz="2000"/>
+          </a:p>
+          <a:p>
+            <a:pPr lvl="0"/>
+            <a:r>
+              <a:rPr lang="en-US" altLang="zh-CN"/>
+              <a:t>UnityFramework.framework: errSecInternalComponent</a:t>
+            </a:r>
+            <a:endParaRPr lang="en-US" altLang="zh-CN"/>
+          </a:p>
+          <a:p>
+            <a:pPr lvl="1"/>
+            <a:r>
+              <a:rPr lang="en-US" altLang="zh-CN" sz="2000"/>
+              <a:t>When input password for login keychain, select “Always allow”</a:t>
+            </a:r>
+            <a:endParaRPr lang="en-US" altLang="zh-CN"/>
+          </a:p>
+          <a:p>
+            <a:pPr lvl="1"/>
+            <a:endParaRPr lang="en-US" altLang="zh-CN"/>
           </a:p>
         </p:txBody>
       </p:sp>
@@ -4668,7 +4878,7 @@
           <a:p>
             <a:r>
               <a:rPr lang="en-US" altLang="zh-CN"/>
-              <a:t>Homebrew</a:t>
+              <a:t>Mac Usage</a:t>
             </a:r>
             <a:endParaRPr lang="en-US" altLang="zh-CN"/>
           </a:p>
@@ -4676,63 +4886,19 @@
       </p:sp>
       <p:sp>
         <p:nvSpPr>
-          <p:cNvPr id="5" name="内容占位符 4"/>
+          <p:cNvPr id="5" name="文本占位符 4"/>
           <p:cNvSpPr>
             <a:spLocks noGrp="1"/>
           </p:cNvSpPr>
           <p:nvPr>
-            <p:ph idx="1"/>
+            <p:ph type="body" idx="1"/>
           </p:nvPr>
         </p:nvSpPr>
         <p:spPr/>
         <p:txBody>
           <a:bodyPr/>
           <a:p>
-            <a:r>
-              <a:rPr lang="en-US" altLang="zh-CN"/>
-              <a:t>Intro</a:t>
-            </a:r>
-            <a:endParaRPr lang="en-US" altLang="zh-CN"/>
-          </a:p>
-          <a:p>
-            <a:pPr lvl="1"/>
-            <a:r>
-              <a:rPr lang="en-US" altLang="zh-CN"/>
-              <a:t>package manager on Mac</a:t>
-            </a:r>
-            <a:endParaRPr lang="en-US" altLang="zh-CN"/>
-          </a:p>
-          <a:p>
-            <a:pPr lvl="0"/>
-            <a:r>
-              <a:rPr lang="en-US" altLang="zh-CN"/>
-              <a:t>Install</a:t>
-            </a:r>
-            <a:endParaRPr lang="en-US" altLang="zh-CN"/>
-          </a:p>
-          <a:p>
-            <a:pPr lvl="1"/>
-            <a:r>
-              <a:rPr lang="en-US" altLang="zh-CN"/>
-              <a:t>/usr/bin/ruby -e "$(curl -fsSL https://cdn.jsdelivr.net/gh/ineo6/homebrew-install/install)"</a:t>
-            </a:r>
-            <a:endParaRPr lang="en-US" altLang="zh-CN"/>
-          </a:p>
-          <a:p>
-            <a:pPr lvl="0"/>
-            <a:r>
-              <a:rPr lang="en-US" altLang="zh-CN"/>
-              <a:t>Usage</a:t>
-            </a:r>
-            <a:endParaRPr lang="en-US" altLang="zh-CN"/>
-          </a:p>
-          <a:p>
-            <a:pPr lvl="1"/>
-            <a:r>
-              <a:rPr lang="en-US" altLang="zh-CN"/>
-              <a:t>brew help</a:t>
-            </a:r>
-            <a:endParaRPr lang="en-US" altLang="zh-CN"/>
+            <a:endParaRPr lang="zh-CN" altLang="en-US"/>
           </a:p>
         </p:txBody>
       </p:sp>
@@ -4759,7 +4925,7 @@
       <p:grpSpPr/>
       <p:sp>
         <p:nvSpPr>
-          <p:cNvPr id="2" name="标题 1"/>
+          <p:cNvPr id="4" name="标题 3"/>
           <p:cNvSpPr>
             <a:spLocks noGrp="1"/>
           </p:cNvSpPr>
@@ -4773,7 +4939,7 @@
           <a:p>
             <a:r>
               <a:rPr lang="en-US" altLang="zh-CN"/>
-              <a:t>Ruby Gems</a:t>
+              <a:t>Homebrew</a:t>
             </a:r>
             <a:endParaRPr lang="en-US" altLang="zh-CN"/>
           </a:p>
@@ -4781,7 +4947,7 @@
       </p:sp>
       <p:sp>
         <p:nvSpPr>
-          <p:cNvPr id="3" name="内容占位符 2"/>
+          <p:cNvPr id="5" name="内容占位符 4"/>
           <p:cNvSpPr>
             <a:spLocks noGrp="1"/>
           </p:cNvSpPr>
@@ -4795,7 +4961,7 @@
           <a:p>
             <a:r>
               <a:rPr lang="en-US" altLang="zh-CN"/>
-              <a:t>Change Mirror Sites</a:t>
+              <a:t>Intro</a:t>
             </a:r>
             <a:endParaRPr lang="en-US" altLang="zh-CN"/>
           </a:p>
@@ -4803,23 +4969,39 @@
             <a:pPr lvl="1"/>
             <a:r>
               <a:rPr lang="en-US" altLang="zh-CN"/>
-              <a:t>sudo gem update --system</a:t>
+              <a:t>package manager on Mac</a:t>
             </a:r>
             <a:endParaRPr lang="en-US" altLang="zh-CN"/>
           </a:p>
           <a:p>
+            <a:pPr lvl="0"/>
+            <a:r>
+              <a:rPr lang="en-US" altLang="zh-CN"/>
+              <a:t>Install</a:t>
+            </a:r>
+            <a:endParaRPr lang="en-US" altLang="zh-CN"/>
+          </a:p>
+          <a:p>
             <a:pPr lvl="1"/>
             <a:r>
               <a:rPr lang="en-US" altLang="zh-CN"/>
-              <a:t>gem sources --remove https://rubygems.org/</a:t>
+              <a:t>/usr/bin/ruby -e "$(curl -fsSL https://cdn.jsdelivr.net/gh/ineo6/homebrew-install/install)"</a:t>
             </a:r>
             <a:endParaRPr lang="en-US" altLang="zh-CN"/>
           </a:p>
           <a:p>
+            <a:pPr lvl="0"/>
+            <a:r>
+              <a:rPr lang="en-US" altLang="zh-CN"/>
+              <a:t>Usage</a:t>
+            </a:r>
+            <a:endParaRPr lang="en-US" altLang="zh-CN"/>
+          </a:p>
+          <a:p>
             <a:pPr lvl="1"/>
             <a:r>
               <a:rPr lang="en-US" altLang="zh-CN"/>
-              <a:t>gem sources --add https://gems.ruby-china.com/</a:t>
+              <a:t>brew help</a:t>
             </a:r>
             <a:endParaRPr lang="en-US" altLang="zh-CN"/>
           </a:p>
@@ -4827,7 +5009,7 @@
             <a:pPr lvl="1"/>
             <a:r>
               <a:rPr lang="en-US" altLang="zh-CN"/>
-              <a:t>gem sources -l</a:t>
+              <a:t>brew info {package-name}</a:t>
             </a:r>
             <a:endParaRPr lang="en-US" altLang="zh-CN"/>
           </a:p>
@@ -4835,7 +5017,7 @@
             <a:pPr lvl="1"/>
             <a:r>
               <a:rPr lang="en-US" altLang="zh-CN"/>
-              <a:t>sudo gem install -n /usr/local/bin cocoapods</a:t>
+              <a:t>brew install {package-name}</a:t>
             </a:r>
             <a:endParaRPr lang="en-US" altLang="zh-CN"/>
           </a:p>
@@ -4843,7 +5025,7 @@
             <a:pPr lvl="1"/>
             <a:r>
               <a:rPr lang="en-US" altLang="zh-CN"/>
-              <a:t>sudo xcode-select -switch /Aplications/Xcode.app/Contents/Developer</a:t>
+              <a:t>brew reinstall {package-name}</a:t>
             </a:r>
             <a:endParaRPr lang="en-US" altLang="zh-CN"/>
           </a:p>
@@ -4886,7 +5068,7 @@
           <a:p>
             <a:r>
               <a:rPr lang="en-US" altLang="zh-CN"/>
-              <a:t>Access Github</a:t>
+              <a:t>Ruby Gems</a:t>
             </a:r>
             <a:endParaRPr lang="en-US" altLang="zh-CN"/>
           </a:p>
@@ -4906,10 +5088,65 @@
         <p:txBody>
           <a:bodyPr/>
           <a:p>
+            <a:r>
+              <a:rPr lang="en-US" altLang="zh-CN"/>
+              <a:t>Change Mirror Sites</a:t>
+            </a:r>
+            <a:endParaRPr lang="en-US" altLang="zh-CN"/>
+          </a:p>
+          <a:p>
+            <a:pPr lvl="1"/>
+            <a:r>
+              <a:rPr lang="en-US" altLang="zh-CN"/>
+              <a:t>sudo gem update --system</a:t>
+            </a:r>
+            <a:endParaRPr lang="en-US" altLang="zh-CN"/>
+          </a:p>
+          <a:p>
+            <a:pPr lvl="1"/>
+            <a:r>
+              <a:rPr lang="en-US" altLang="zh-CN"/>
+              <a:t>gem sources --remove https://rubygems.org/</a:t>
+            </a:r>
+            <a:endParaRPr lang="en-US" altLang="zh-CN"/>
+          </a:p>
+          <a:p>
+            <a:pPr lvl="1"/>
+            <a:r>
+              <a:rPr lang="en-US" altLang="zh-CN"/>
+              <a:t>gem sources --add https://gems.ruby-china.com/</a:t>
+            </a:r>
+            <a:endParaRPr lang="en-US" altLang="zh-CN"/>
+          </a:p>
+          <a:p>
+            <a:pPr lvl="1"/>
+            <a:r>
+              <a:rPr lang="en-US" altLang="zh-CN"/>
+              <a:t>gem sources -l</a:t>
+            </a:r>
+            <a:endParaRPr lang="en-US" altLang="zh-CN"/>
+          </a:p>
+          <a:p>
+            <a:pPr lvl="1"/>
+            <a:r>
+              <a:rPr lang="en-US" altLang="zh-CN"/>
+              <a:t>sudo gem install -n /usr/local/bin cocoapods</a:t>
+            </a:r>
+            <a:endParaRPr lang="en-US" altLang="zh-CN"/>
+          </a:p>
+          <a:p>
+            <a:pPr lvl="1"/>
+            <a:r>
+              <a:rPr lang="en-US" altLang="zh-CN"/>
+              <a:t>sudo xcode-select -switch /Aplications/Xcode.app/Contents/Developer</a:t>
+            </a:r>
+            <a:endParaRPr lang="en-US" altLang="zh-CN"/>
+          </a:p>
+          <a:p>
             <a:pPr lvl="0"/>
             <a:r>
               <a:rPr lang="en-US" altLang="zh-CN"/>
-              <a:t>Steps</a:t>
+              <a:t>Bundler</a:t>
             </a:r>
             <a:endParaRPr lang="en-US" altLang="zh-CN"/>
           </a:p>
@@ -4917,15 +5154,27 @@
             <a:pPr lvl="1"/>
             <a:r>
               <a:rPr lang="en-US" altLang="zh-CN"/>
-              <a:t>http://ping.chinaz.com/ query github.com, to get fast-response ip</a:t>
+              <a:t>Ruby</a:t>
+            </a:r>
+            <a:r>
+              <a:rPr lang="zh-CN" altLang="en-US"/>
+              <a:t>包管理工具</a:t>
+            </a:r>
+            <a:endParaRPr lang="zh-CN" altLang="en-US"/>
+          </a:p>
+          <a:p>
+            <a:pPr lvl="1"/>
+            <a:r>
+              <a:rPr lang="en-US" altLang="zh-CN"/>
+              <a:t>bundle install</a:t>
             </a:r>
             <a:endParaRPr lang="en-US" altLang="zh-CN"/>
           </a:p>
           <a:p>
-            <a:pPr lvl="1"/>
+            <a:pPr lvl="2"/>
             <a:r>
               <a:rPr lang="en-US" altLang="zh-CN"/>
-              <a:t>modify /etc/hosts, add ip/url pair</a:t>
+              <a:t>read Gemfile, install listed gems</a:t>
             </a:r>
             <a:endParaRPr lang="en-US" altLang="zh-CN"/>
           </a:p>
@@ -4954,7 +5203,7 @@
       <p:grpSpPr/>
       <p:sp>
         <p:nvSpPr>
-          <p:cNvPr id="4" name="标题 3"/>
+          <p:cNvPr id="2" name="标题 1"/>
           <p:cNvSpPr>
             <a:spLocks noGrp="1"/>
           </p:cNvSpPr>
@@ -4968,7 +5217,7 @@
           <a:p>
             <a:r>
               <a:rPr lang="en-US" altLang="zh-CN"/>
-              <a:t>iOS Internal</a:t>
+              <a:t>Access Github</a:t>
             </a:r>
             <a:endParaRPr lang="en-US" altLang="zh-CN"/>
           </a:p>
@@ -4976,19 +5225,40 @@
       </p:sp>
       <p:sp>
         <p:nvSpPr>
-          <p:cNvPr id="5" name="文本占位符 4"/>
+          <p:cNvPr id="3" name="内容占位符 2"/>
           <p:cNvSpPr>
             <a:spLocks noGrp="1"/>
           </p:cNvSpPr>
           <p:nvPr>
-            <p:ph type="body" idx="1"/>
+            <p:ph idx="1"/>
           </p:nvPr>
         </p:nvSpPr>
         <p:spPr/>
         <p:txBody>
           <a:bodyPr/>
           <a:p>
-            <a:endParaRPr lang="zh-CN" altLang="en-US"/>
+            <a:pPr lvl="0"/>
+            <a:r>
+              <a:rPr lang="en-US" altLang="zh-CN"/>
+              <a:t>Steps</a:t>
+            </a:r>
+            <a:endParaRPr lang="en-US" altLang="zh-CN"/>
+          </a:p>
+          <a:p>
+            <a:pPr lvl="1"/>
+            <a:r>
+              <a:rPr lang="en-US" altLang="zh-CN"/>
+              <a:t>http://ping.chinaz.com/ query github.com, to get fast-response ip</a:t>
+            </a:r>
+            <a:endParaRPr lang="en-US" altLang="zh-CN"/>
+          </a:p>
+          <a:p>
+            <a:pPr lvl="1"/>
+            <a:r>
+              <a:rPr lang="en-US" altLang="zh-CN"/>
+              <a:t>modify /etc/hosts, add ip/url pair</a:t>
+            </a:r>
+            <a:endParaRPr lang="en-US" altLang="zh-CN"/>
           </a:p>
         </p:txBody>
       </p:sp>
@@ -5065,6 +5335,67 @@
 </file>
 
 <file path=ppt/slides/slide20.xml><?xml version="1.0" encoding="utf-8"?>
+<p:sld xmlns:a="http://schemas.openxmlformats.org/drawingml/2006/main" xmlns:r="http://schemas.openxmlformats.org/officeDocument/2006/relationships" xmlns:p="http://schemas.openxmlformats.org/presentationml/2006/main">
+  <p:cSld>
+    <p:spTree>
+      <p:nvGrpSpPr>
+        <p:cNvPr id="1" name=""/>
+        <p:cNvGrpSpPr/>
+        <p:nvPr/>
+      </p:nvGrpSpPr>
+      <p:grpSpPr/>
+      <p:sp>
+        <p:nvSpPr>
+          <p:cNvPr id="4" name="标题 3"/>
+          <p:cNvSpPr>
+            <a:spLocks noGrp="1"/>
+          </p:cNvSpPr>
+          <p:nvPr>
+            <p:ph type="title"/>
+          </p:nvPr>
+        </p:nvSpPr>
+        <p:spPr/>
+        <p:txBody>
+          <a:bodyPr/>
+          <a:p>
+            <a:r>
+              <a:rPr lang="en-US" altLang="zh-CN"/>
+              <a:t>iOS Internal</a:t>
+            </a:r>
+            <a:endParaRPr lang="en-US" altLang="zh-CN"/>
+          </a:p>
+        </p:txBody>
+      </p:sp>
+      <p:sp>
+        <p:nvSpPr>
+          <p:cNvPr id="5" name="文本占位符 4"/>
+          <p:cNvSpPr>
+            <a:spLocks noGrp="1"/>
+          </p:cNvSpPr>
+          <p:nvPr>
+            <p:ph type="body" idx="1"/>
+          </p:nvPr>
+        </p:nvSpPr>
+        <p:spPr/>
+        <p:txBody>
+          <a:bodyPr/>
+          <a:p>
+            <a:endParaRPr lang="zh-CN" altLang="en-US"/>
+          </a:p>
+        </p:txBody>
+      </p:sp>
+    </p:spTree>
+    <p:custDataLst>
+      <p:tags r:id="rId1"/>
+    </p:custDataLst>
+  </p:cSld>
+  <p:clrMapOvr>
+    <a:masterClrMapping/>
+  </p:clrMapOvr>
+</p:sld>
+</file>
+
+<file path=ppt/slides/slide21.xml><?xml version="1.0" encoding="utf-8"?>
 <p:sld xmlns:a="http://schemas.openxmlformats.org/drawingml/2006/main" xmlns:r="http://schemas.openxmlformats.org/officeDocument/2006/relationships" xmlns:p="http://schemas.openxmlformats.org/presentationml/2006/main">
   <p:cSld>
     <p:spTree>
@@ -5140,8 +5471,8 @@
                 <a:gs pos="100000">
                   <a:schemeClr val="accent4">
                     <a:hueOff val="-903206"/>
-                    <a:satOff val="-17110"/>
-                    <a:lumOff val="-2075"/>
+                    <a:satOff val="-17109"/>
+                    <a:lumOff val="-2074"/>
                   </a:schemeClr>
                 </a:gs>
               </a:gsLst>
@@ -5783,8 +6114,8 @@
                 <a:gs pos="100000">
                   <a:schemeClr val="accent4">
                     <a:hueOff val="-903206"/>
-                    <a:satOff val="-17110"/>
-                    <a:lumOff val="-2075"/>
+                    <a:satOff val="-17109"/>
+                    <a:lumOff val="-2074"/>
                   </a:schemeClr>
                 </a:gs>
               </a:gsLst>
@@ -7480,8 +7811,8 @@
                 <a:gs pos="100000">
                   <a:schemeClr val="accent4">
                     <a:hueOff val="-903206"/>
-                    <a:satOff val="-17110"/>
-                    <a:lumOff val="-2075"/>
+                    <a:satOff val="-17109"/>
+                    <a:lumOff val="-2074"/>
                   </a:schemeClr>
                 </a:gs>
               </a:gsLst>
@@ -8867,8 +9198,8 @@
                 <a:gs pos="100000">
                   <a:schemeClr val="accent4">
                     <a:hueOff val="-903206"/>
-                    <a:satOff val="-17110"/>
-                    <a:lumOff val="-2075"/>
+                    <a:satOff val="-17109"/>
+                    <a:lumOff val="-2074"/>
                   </a:schemeClr>
                 </a:gs>
               </a:gsLst>
@@ -9595,7 +9926,7 @@
 </p:sld>
 </file>
 
-<file path=ppt/slides/slide21.xml><?xml version="1.0" encoding="utf-8"?>
+<file path=ppt/slides/slide22.xml><?xml version="1.0" encoding="utf-8"?>
 <p:sld xmlns:a="http://schemas.openxmlformats.org/drawingml/2006/main" xmlns:r="http://schemas.openxmlformats.org/officeDocument/2006/relationships" xmlns:p="http://schemas.openxmlformats.org/presentationml/2006/main">
   <p:cSld>
     <p:spTree>
@@ -9671,8 +10002,8 @@
                 <a:gs pos="100000">
                   <a:schemeClr val="accent4">
                     <a:hueOff val="-903206"/>
-                    <a:satOff val="-17110"/>
-                    <a:lumOff val="-2075"/>
+                    <a:satOff val="-17109"/>
+                    <a:lumOff val="-2074"/>
                   </a:schemeClr>
                 </a:gs>
               </a:gsLst>
@@ -10297,7 +10628,7 @@
 </p:sld>
 </file>
 
-<file path=ppt/slides/slide22.xml><?xml version="1.0" encoding="utf-8"?>
+<file path=ppt/slides/slide23.xml><?xml version="1.0" encoding="utf-8"?>
 <p:sld xmlns:a="http://schemas.openxmlformats.org/drawingml/2006/main" xmlns:r="http://schemas.openxmlformats.org/officeDocument/2006/relationships" xmlns:p="http://schemas.openxmlformats.org/presentationml/2006/main">
   <p:cSld>
     <p:spTree>
@@ -10373,8 +10704,8 @@
                 <a:gs pos="100000">
                   <a:schemeClr val="accent4">
                     <a:hueOff val="-903206"/>
-                    <a:satOff val="-17110"/>
-                    <a:lumOff val="-2075"/>
+                    <a:satOff val="-17109"/>
+                    <a:lumOff val="-2074"/>
                   </a:schemeClr>
                 </a:gs>
               </a:gsLst>
@@ -11140,8 +11471,8 @@
                 <a:gs pos="100000">
                   <a:schemeClr val="accent4">
                     <a:hueOff val="-903206"/>
-                    <a:satOff val="-17110"/>
-                    <a:lumOff val="-2075"/>
+                    <a:satOff val="-17109"/>
+                    <a:lumOff val="-2074"/>
                   </a:schemeClr>
                 </a:gs>
               </a:gsLst>
@@ -11473,8 +11804,8 @@
                 <a:gs pos="100000">
                   <a:schemeClr val="accent4">
                     <a:hueOff val="-903206"/>
-                    <a:satOff val="-17110"/>
-                    <a:lumOff val="-2075"/>
+                    <a:satOff val="-17109"/>
+                    <a:lumOff val="-2074"/>
                   </a:schemeClr>
                 </a:gs>
               </a:gsLst>
@@ -11789,7 +12120,7 @@
 </p:sld>
 </file>
 
-<file path=ppt/slides/slide23.xml><?xml version="1.0" encoding="utf-8"?>
+<file path=ppt/slides/slide24.xml><?xml version="1.0" encoding="utf-8"?>
 <p:sld xmlns:a="http://schemas.openxmlformats.org/drawingml/2006/main" xmlns:r="http://schemas.openxmlformats.org/officeDocument/2006/relationships" xmlns:p="http://schemas.openxmlformats.org/presentationml/2006/main">
   <p:cSld>
     <p:spTree>
@@ -11851,8 +12182,8 @@
               <a:gs pos="100000">
                 <a:schemeClr val="accent4">
                   <a:hueOff val="-903206"/>
-                  <a:satOff val="-17110"/>
-                  <a:lumOff val="-2075"/>
+                  <a:satOff val="-17109"/>
+                  <a:lumOff val="-2074"/>
                 </a:schemeClr>
               </a:gs>
             </a:gsLst>
@@ -13317,12 +13648,12 @@
         <p:spPr>
           <a:xfrm>
             <a:off x="838200" y="1211580"/>
-            <a:ext cx="10515600" cy="5422900"/>
+            <a:ext cx="5781040" cy="5422900"/>
           </a:xfrm>
         </p:spPr>
         <p:txBody>
           <a:bodyPr>
-            <a:normAutofit/>
+            <a:normAutofit lnSpcReduction="10000"/>
           </a:bodyPr>
           <a:p>
             <a:pPr lvl="0"/>
@@ -13340,6 +13671,18 @@
               <a:rPr lang="en-US" altLang="zh-CN">
                 <a:sym typeface="+mn-ea"/>
               </a:rPr>
+              <a:t>https://developer.apple.com/account</a:t>
+            </a:r>
+            <a:endParaRPr lang="en-US" altLang="zh-CN">
+              <a:sym typeface="+mn-ea"/>
+            </a:endParaRPr>
+          </a:p>
+          <a:p>
+            <a:pPr lvl="1"/>
+            <a:r>
+              <a:rPr lang="en-US" altLang="zh-CN">
+                <a:sym typeface="+mn-ea"/>
+              </a:rPr>
               <a:t>Add UDIDs</a:t>
             </a:r>
             <a:endParaRPr lang="en-US" altLang="zh-CN">
@@ -13416,6 +13759,18 @@
               </a:rPr>
               <a:t>Create a provisioning profile</a:t>
             </a:r>
+            <a:endParaRPr lang="en-US" altLang="zh-CN">
+              <a:sym typeface="+mn-ea"/>
+            </a:endParaRPr>
+          </a:p>
+          <a:p>
+            <a:pPr lvl="2"/>
+            <a:r>
+              <a:rPr lang="en-US" altLang="zh-CN" sz="1800">
+                <a:sym typeface="+mn-ea"/>
+              </a:rPr>
+              <a:t>Create certificate</a:t>
+            </a:r>
             <a:endParaRPr lang="en-US" altLang="zh-CN"/>
           </a:p>
           <a:p>
@@ -13429,7 +13784,7 @@
             <a:pPr lvl="1"/>
             <a:r>
               <a:rPr lang="en-US" altLang="zh-CN"/>
-              <a:t>Select project, in mid-pane, select “Signing &amp; Capabilities”</a:t>
+              <a:t>in XCode, select project, in mid-pane, select “Signing &amp; Capabilities”</a:t>
             </a:r>
             <a:endParaRPr lang="en-US" altLang="zh-CN"/>
           </a:p>
@@ -13451,9 +13806,33 @@
           </a:p>
         </p:txBody>
       </p:sp>
+      <p:pic>
+        <p:nvPicPr>
+          <p:cNvPr id="4" name="图片 3"/>
+          <p:cNvPicPr>
+            <a:picLocks noChangeAspect="1"/>
+          </p:cNvPicPr>
+          <p:nvPr/>
+        </p:nvPicPr>
+        <p:blipFill>
+          <a:blip r:embed="rId1"/>
+          <a:stretch>
+            <a:fillRect/>
+          </a:stretch>
+        </p:blipFill>
+        <p:spPr>
+          <a:xfrm>
+            <a:off x="6671945" y="1052830"/>
+            <a:ext cx="5315585" cy="3326765"/>
+          </a:xfrm>
+          <a:prstGeom prst="rect">
+            <a:avLst/>
+          </a:prstGeom>
+        </p:spPr>
+      </p:pic>
     </p:spTree>
     <p:custDataLst>
-      <p:tags r:id="rId1"/>
+      <p:tags r:id="rId2"/>
     </p:custDataLst>
   </p:cSld>
   <p:clrMapOvr>
@@ -14248,6 +14627,7 @@
 
 <file path=ppt/tags/tag23.xml><?xml version="1.0" encoding="utf-8"?>
 <p:tagLst xmlns:p="http://schemas.openxmlformats.org/presentationml/2006/main">
+  <p:tag name="KSO_WM_BEAUTIFY_FLAG" val="#wm#"/>
   <p:tag name="KSO_WM_TEMPLATE_CATEGORY" val="custom"/>
   <p:tag name="KSO_WM_TEMPLATE_INDEX" val="160402"/>
 </p:tagLst>
@@ -14275,6 +14655,13 @@
 </file>
 
 <file path=ppt/tags/tag27.xml><?xml version="1.0" encoding="utf-8"?>
+<p:tagLst xmlns:p="http://schemas.openxmlformats.org/presentationml/2006/main">
+  <p:tag name="KSO_WM_TEMPLATE_CATEGORY" val="custom"/>
+  <p:tag name="KSO_WM_TEMPLATE_INDEX" val="160402"/>
+</p:tagLst>
+</file>
+
+<file path=ppt/tags/tag28.xml><?xml version="1.0" encoding="utf-8"?>
 <p:tagLst xmlns:p="http://schemas.openxmlformats.org/presentationml/2006/main">
   <p:tag name="commondata" val="eyJoZGlkIjoiYjRhZjQ5NWVmZmQxNmM3NmNkNDYxNWRmNzNmMjA1ZDAifQ=="/>
 </p:tagLst>
@@ -15669,4 +16056,263 @@
     </a:ext>
   </a:extLst>
 </a:theme>
+</file>
+
+<file path=ppt/theme/theme3.xml><?xml version="1.0" encoding="utf-8"?>
+<a:theme xmlns:a="http://schemas.openxmlformats.org/drawingml/2006/main" name="Office 主题">
+  <a:themeElements>
+    <a:clrScheme name="Office">
+      <a:dk1>
+        <a:sysClr val="windowText" lastClr="000000"/>
+      </a:dk1>
+      <a:lt1>
+        <a:sysClr val="window" lastClr="FFFFFF"/>
+      </a:lt1>
+      <a:dk2>
+        <a:srgbClr val="44546A"/>
+      </a:dk2>
+      <a:lt2>
+        <a:srgbClr val="E7E6E6"/>
+      </a:lt2>
+      <a:accent1>
+        <a:srgbClr val="5B9BD5"/>
+      </a:accent1>
+      <a:accent2>
+        <a:srgbClr val="ED7D31"/>
+      </a:accent2>
+      <a:accent3>
+        <a:srgbClr val="A5A5A5"/>
+      </a:accent3>
+      <a:accent4>
+        <a:srgbClr val="FFC000"/>
+      </a:accent4>
+      <a:accent5>
+        <a:srgbClr val="4472C4"/>
+      </a:accent5>
+      <a:accent6>
+        <a:srgbClr val="70AD47"/>
+      </a:accent6>
+      <a:hlink>
+        <a:srgbClr val="0563C1"/>
+      </a:hlink>
+      <a:folHlink>
+        <a:srgbClr val="954F72"/>
+      </a:folHlink>
+    </a:clrScheme>
+    <a:fontScheme name="Office">
+      <a:majorFont>
+        <a:latin typeface="Calibri Light"/>
+        <a:ea typeface=""/>
+        <a:cs typeface=""/>
+        <a:font script="Jpan" typeface="ＭＳ Ｐゴシック"/>
+        <a:font script="Hang" typeface="맑은 고딕"/>
+        <a:font script="Hans" typeface="宋体"/>
+        <a:font script="Hant" typeface="新細明體"/>
+        <a:font script="Arab" typeface="Times New Roman"/>
+        <a:font script="Hebr" typeface="Times New Roman"/>
+        <a:font script="Thai" typeface="Angsana New"/>
+        <a:font script="Ethi" typeface="Nyala"/>
+        <a:font script="Beng" typeface="Vrinda"/>
+        <a:font script="Gujr" typeface="Shruti"/>
+        <a:font script="Khmr" typeface="MoolBoran"/>
+        <a:font script="Knda" typeface="Tunga"/>
+        <a:font script="Guru" typeface="Raavi"/>
+        <a:font script="Cans" typeface="Euphemia"/>
+        <a:font script="Cher" typeface="Plantagenet Cherokee"/>
+        <a:font script="Yiii" typeface="Microsoft Yi Baiti"/>
+        <a:font script="Tibt" typeface="Microsoft Himalaya"/>
+        <a:font script="Thaa" typeface="MV Boli"/>
+        <a:font script="Deva" typeface="Mangal"/>
+        <a:font script="Telu" typeface="Gautami"/>
+        <a:font script="Taml" typeface="Latha"/>
+        <a:font script="Syrc" typeface="Estrangelo Edessa"/>
+        <a:font script="Orya" typeface="Kalinga"/>
+        <a:font script="Mlym" typeface="Kartika"/>
+        <a:font script="Laoo" typeface="DokChampa"/>
+        <a:font script="Sinh" typeface="Iskoola Pota"/>
+        <a:font script="Mong" typeface="Mongolian Baiti"/>
+        <a:font script="Viet" typeface="Times New Roman"/>
+        <a:font script="Uigh" typeface="Microsoft Uighur"/>
+        <a:font script="Geor" typeface="Sylfaen"/>
+      </a:majorFont>
+      <a:minorFont>
+        <a:latin typeface="Calibri"/>
+        <a:ea typeface=""/>
+        <a:cs typeface=""/>
+        <a:font script="Jpan" typeface="ＭＳ Ｐゴシック"/>
+        <a:font script="Hang" typeface="맑은 고딕"/>
+        <a:font script="Hans" typeface="宋体"/>
+        <a:font script="Hant" typeface="新細明體"/>
+        <a:font script="Arab" typeface="Arial"/>
+        <a:font script="Hebr" typeface="Arial"/>
+        <a:font script="Thai" typeface="Cordia New"/>
+        <a:font script="Ethi" typeface="Nyala"/>
+        <a:font script="Beng" typeface="Vrinda"/>
+        <a:font script="Gujr" typeface="Shruti"/>
+        <a:font script="Khmr" typeface="DaunPenh"/>
+        <a:font script="Knda" typeface="Tunga"/>
+        <a:font script="Guru" typeface="Raavi"/>
+        <a:font script="Cans" typeface="Euphemia"/>
+        <a:font script="Cher" typeface="Plantagenet Cherokee"/>
+        <a:font script="Yiii" typeface="Microsoft Yi Baiti"/>
+        <a:font script="Tibt" typeface="Microsoft Himalaya"/>
+        <a:font script="Thaa" typeface="MV Boli"/>
+        <a:font script="Deva" typeface="Mangal"/>
+        <a:font script="Telu" typeface="Gautami"/>
+        <a:font script="Taml" typeface="Latha"/>
+        <a:font script="Syrc" typeface="Estrangelo Edessa"/>
+        <a:font script="Orya" typeface="Kalinga"/>
+        <a:font script="Mlym" typeface="Kartika"/>
+        <a:font script="Laoo" typeface="DokChampa"/>
+        <a:font script="Sinh" typeface="Iskoola Pota"/>
+        <a:font script="Mong" typeface="Mongolian Baiti"/>
+        <a:font script="Viet" typeface="Arial"/>
+        <a:font script="Uigh" typeface="Microsoft Uighur"/>
+        <a:font script="Geor" typeface="Sylfaen"/>
+      </a:minorFont>
+    </a:fontScheme>
+    <a:fmtScheme name="Office">
+      <a:fillStyleLst>
+        <a:solidFill>
+          <a:schemeClr val="phClr"/>
+        </a:solidFill>
+        <a:gradFill rotWithShape="1">
+          <a:gsLst>
+            <a:gs pos="0">
+              <a:schemeClr val="phClr">
+                <a:lumMod val="110000"/>
+                <a:satMod val="105000"/>
+                <a:tint val="67000"/>
+              </a:schemeClr>
+            </a:gs>
+            <a:gs pos="50000">
+              <a:schemeClr val="phClr">
+                <a:lumMod val="105000"/>
+                <a:satMod val="103000"/>
+                <a:tint val="73000"/>
+              </a:schemeClr>
+            </a:gs>
+            <a:gs pos="100000">
+              <a:schemeClr val="phClr">
+                <a:lumMod val="105000"/>
+                <a:satMod val="109000"/>
+                <a:tint val="81000"/>
+              </a:schemeClr>
+            </a:gs>
+          </a:gsLst>
+          <a:lin ang="5400000" scaled="0"/>
+        </a:gradFill>
+        <a:gradFill rotWithShape="1">
+          <a:gsLst>
+            <a:gs pos="0">
+              <a:schemeClr val="phClr">
+                <a:satMod val="103000"/>
+                <a:lumMod val="102000"/>
+                <a:tint val="94000"/>
+              </a:schemeClr>
+            </a:gs>
+            <a:gs pos="50000">
+              <a:schemeClr val="phClr">
+                <a:satMod val="110000"/>
+                <a:lumMod val="100000"/>
+                <a:shade val="100000"/>
+              </a:schemeClr>
+            </a:gs>
+            <a:gs pos="100000">
+              <a:schemeClr val="phClr">
+                <a:lumMod val="99000"/>
+                <a:satMod val="120000"/>
+                <a:shade val="78000"/>
+              </a:schemeClr>
+            </a:gs>
+          </a:gsLst>
+          <a:lin ang="5400000" scaled="0"/>
+        </a:gradFill>
+      </a:fillStyleLst>
+      <a:lnStyleLst>
+        <a:ln w="6350" cap="flat" cmpd="sng" algn="ctr">
+          <a:solidFill>
+            <a:schemeClr val="phClr"/>
+          </a:solidFill>
+          <a:prstDash val="solid"/>
+          <a:miter lim="800000"/>
+        </a:ln>
+        <a:ln w="12700" cap="flat" cmpd="sng" algn="ctr">
+          <a:solidFill>
+            <a:schemeClr val="phClr"/>
+          </a:solidFill>
+          <a:prstDash val="solid"/>
+          <a:miter lim="800000"/>
+        </a:ln>
+        <a:ln w="19050" cap="flat" cmpd="sng" algn="ctr">
+          <a:solidFill>
+            <a:schemeClr val="phClr"/>
+          </a:solidFill>
+          <a:prstDash val="solid"/>
+          <a:miter lim="800000"/>
+        </a:ln>
+      </a:lnStyleLst>
+      <a:effectStyleLst>
+        <a:effectStyle>
+          <a:effectLst/>
+        </a:effectStyle>
+        <a:effectStyle>
+          <a:effectLst/>
+        </a:effectStyle>
+        <a:effectStyle>
+          <a:effectLst>
+            <a:outerShdw blurRad="57150" dist="19050" dir="5400000" algn="ctr" rotWithShape="0">
+              <a:srgbClr val="000000">
+                <a:alpha val="63000"/>
+              </a:srgbClr>
+            </a:outerShdw>
+          </a:effectLst>
+        </a:effectStyle>
+      </a:effectStyleLst>
+      <a:bgFillStyleLst>
+        <a:solidFill>
+          <a:schemeClr val="phClr"/>
+        </a:solidFill>
+        <a:solidFill>
+          <a:schemeClr val="phClr">
+            <a:tint val="95000"/>
+            <a:satMod val="170000"/>
+          </a:schemeClr>
+        </a:solidFill>
+        <a:gradFill rotWithShape="1">
+          <a:gsLst>
+            <a:gs pos="0">
+              <a:schemeClr val="phClr">
+                <a:tint val="93000"/>
+                <a:satMod val="150000"/>
+                <a:shade val="98000"/>
+                <a:lumMod val="102000"/>
+              </a:schemeClr>
+            </a:gs>
+            <a:gs pos="50000">
+              <a:schemeClr val="phClr">
+                <a:tint val="98000"/>
+                <a:satMod val="130000"/>
+                <a:shade val="90000"/>
+                <a:lumMod val="103000"/>
+              </a:schemeClr>
+            </a:gs>
+            <a:gs pos="100000">
+              <a:schemeClr val="phClr">
+                <a:shade val="63000"/>
+                <a:satMod val="120000"/>
+              </a:schemeClr>
+            </a:gs>
+          </a:gsLst>
+          <a:lin ang="5400000" scaled="0"/>
+        </a:gradFill>
+      </a:bgFillStyleLst>
+    </a:fmtScheme>
+  </a:themeElements>
+  <a:extLst>
+    <a:ext uri="{05A4C25C-085E-4340-85A3-A5531E510DB2}">
+      <thm15:themeFamily xmlns:thm15="http://schemas.microsoft.com/office/thememl/2012/main" name="Office Theme" id="{62F939B6-93AF-4DB8-9C6B-D6C7DFDC589F}" vid="{4A3C46E8-61CC-4603-A589-7422A47A8E4A}"/>
+    </a:ext>
+  </a:extLst>
+</a:theme>
 </file>